--- a/chapter_04/tables/01_forecasts_types.pptx
+++ b/chapter_04/tables/01_forecasts_types.pptx
@@ -110,14 +110,6 @@
     </p:ext>
   </p:extLst>
 </p:presentation>
-</file>
-
-<file path=ppt/revisionInfo.xml><?xml version="1.0" encoding="utf-8"?>
-<p1510:revInfo xmlns:a="http://schemas.openxmlformats.org/drawingml/2006/main" xmlns:r="http://schemas.openxmlformats.org/officeDocument/2006/relationships" xmlns:p1510="http://schemas.microsoft.com/office/powerpoint/2015/10/main">
-  <p1510:revLst>
-    <p1510:client id="{9499B2B4-FAAC-435D-8D03-AF2D062895C2}" v="19" dt="2025-05-26T07:08:59.083"/>
-  </p1510:revLst>
-</p1510:revInfo>
 </file>
 
 <file path=ppt/changesInfos/changesInfo1.xml><?xml version="1.0" encoding="utf-8"?>
@@ -266,6 +258,38 @@
       </pc:sldChg>
     </pc:docChg>
   </pc:docChgLst>
+  <pc:docChgLst>
+    <pc:chgData name="Fatima Pillosu" userId="a6295d4dc9e22643" providerId="LiveId" clId="{99324F6C-297E-4162-BC49-3E327AE98FF2}"/>
+    <pc:docChg chg="modSld">
+      <pc:chgData name="Fatima Pillosu" userId="a6295d4dc9e22643" providerId="LiveId" clId="{99324F6C-297E-4162-BC49-3E327AE98FF2}" dt="2025-07-14T20:15:51.029" v="34" actId="6549"/>
+      <pc:docMkLst>
+        <pc:docMk/>
+      </pc:docMkLst>
+      <pc:sldChg chg="modSp mod">
+        <pc:chgData name="Fatima Pillosu" userId="a6295d4dc9e22643" providerId="LiveId" clId="{99324F6C-297E-4162-BC49-3E327AE98FF2}" dt="2025-07-14T20:15:51.029" v="34" actId="6549"/>
+        <pc:sldMkLst>
+          <pc:docMk/>
+          <pc:sldMk cId="3020345181" sldId="257"/>
+        </pc:sldMkLst>
+        <pc:spChg chg="mod">
+          <ac:chgData name="Fatima Pillosu" userId="a6295d4dc9e22643" providerId="LiveId" clId="{99324F6C-297E-4162-BC49-3E327AE98FF2}" dt="2025-07-14T20:15:26.670" v="14" actId="20577"/>
+          <ac:spMkLst>
+            <pc:docMk/>
+            <pc:sldMk cId="3020345181" sldId="257"/>
+            <ac:spMk id="4" creationId="{BFB118F7-3AF0-A668-608B-98A47405975A}"/>
+          </ac:spMkLst>
+        </pc:spChg>
+        <pc:graphicFrameChg chg="modGraphic">
+          <ac:chgData name="Fatima Pillosu" userId="a6295d4dc9e22643" providerId="LiveId" clId="{99324F6C-297E-4162-BC49-3E327AE98FF2}" dt="2025-07-14T20:15:51.029" v="34" actId="6549"/>
+          <ac:graphicFrameMkLst>
+            <pc:docMk/>
+            <pc:sldMk cId="3020345181" sldId="257"/>
+            <ac:graphicFrameMk id="3" creationId="{15623DAB-A4E1-DF1C-9B96-E2C1CE9DE49A}"/>
+          </ac:graphicFrameMkLst>
+        </pc:graphicFrameChg>
+      </pc:sldChg>
+    </pc:docChg>
+  </pc:docChgLst>
 </pc:chgInfo>
 </file>
 
@@ -400,7 +424,7 @@
           <a:p>
             <a:fld id="{1FB3EBC5-2BAE-4ECB-A995-B52653FE7498}" type="datetimeFigureOut">
               <a:rPr lang="en-GB" smtClean="0"/>
-              <a:t>26/05/2025</a:t>
+              <a:t>14/07/2025</a:t>
             </a:fld>
             <a:endParaRPr lang="en-GB"/>
           </a:p>
@@ -570,7 +594,7 @@
           <a:p>
             <a:fld id="{1FB3EBC5-2BAE-4ECB-A995-B52653FE7498}" type="datetimeFigureOut">
               <a:rPr lang="en-GB" smtClean="0"/>
-              <a:t>26/05/2025</a:t>
+              <a:t>14/07/2025</a:t>
             </a:fld>
             <a:endParaRPr lang="en-GB"/>
           </a:p>
@@ -750,7 +774,7 @@
           <a:p>
             <a:fld id="{1FB3EBC5-2BAE-4ECB-A995-B52653FE7498}" type="datetimeFigureOut">
               <a:rPr lang="en-GB" smtClean="0"/>
-              <a:t>26/05/2025</a:t>
+              <a:t>14/07/2025</a:t>
             </a:fld>
             <a:endParaRPr lang="en-GB"/>
           </a:p>
@@ -920,7 +944,7 @@
           <a:p>
             <a:fld id="{1FB3EBC5-2BAE-4ECB-A995-B52653FE7498}" type="datetimeFigureOut">
               <a:rPr lang="en-GB" smtClean="0"/>
-              <a:t>26/05/2025</a:t>
+              <a:t>14/07/2025</a:t>
             </a:fld>
             <a:endParaRPr lang="en-GB"/>
           </a:p>
@@ -1166,7 +1190,7 @@
           <a:p>
             <a:fld id="{1FB3EBC5-2BAE-4ECB-A995-B52653FE7498}" type="datetimeFigureOut">
               <a:rPr lang="en-GB" smtClean="0"/>
-              <a:t>26/05/2025</a:t>
+              <a:t>14/07/2025</a:t>
             </a:fld>
             <a:endParaRPr lang="en-GB"/>
           </a:p>
@@ -1398,7 +1422,7 @@
           <a:p>
             <a:fld id="{1FB3EBC5-2BAE-4ECB-A995-B52653FE7498}" type="datetimeFigureOut">
               <a:rPr lang="en-GB" smtClean="0"/>
-              <a:t>26/05/2025</a:t>
+              <a:t>14/07/2025</a:t>
             </a:fld>
             <a:endParaRPr lang="en-GB"/>
           </a:p>
@@ -1765,7 +1789,7 @@
           <a:p>
             <a:fld id="{1FB3EBC5-2BAE-4ECB-A995-B52653FE7498}" type="datetimeFigureOut">
               <a:rPr lang="en-GB" smtClean="0"/>
-              <a:t>26/05/2025</a:t>
+              <a:t>14/07/2025</a:t>
             </a:fld>
             <a:endParaRPr lang="en-GB"/>
           </a:p>
@@ -1883,7 +1907,7 @@
           <a:p>
             <a:fld id="{1FB3EBC5-2BAE-4ECB-A995-B52653FE7498}" type="datetimeFigureOut">
               <a:rPr lang="en-GB" smtClean="0"/>
-              <a:t>26/05/2025</a:t>
+              <a:t>14/07/2025</a:t>
             </a:fld>
             <a:endParaRPr lang="en-GB"/>
           </a:p>
@@ -1978,7 +2002,7 @@
           <a:p>
             <a:fld id="{1FB3EBC5-2BAE-4ECB-A995-B52653FE7498}" type="datetimeFigureOut">
               <a:rPr lang="en-GB" smtClean="0"/>
-              <a:t>26/05/2025</a:t>
+              <a:t>14/07/2025</a:t>
             </a:fld>
             <a:endParaRPr lang="en-GB"/>
           </a:p>
@@ -2255,7 +2279,7 @@
           <a:p>
             <a:fld id="{1FB3EBC5-2BAE-4ECB-A995-B52653FE7498}" type="datetimeFigureOut">
               <a:rPr lang="en-GB" smtClean="0"/>
-              <a:t>26/05/2025</a:t>
+              <a:t>14/07/2025</a:t>
             </a:fld>
             <a:endParaRPr lang="en-GB"/>
           </a:p>
@@ -2512,7 +2536,7 @@
           <a:p>
             <a:fld id="{1FB3EBC5-2BAE-4ECB-A995-B52653FE7498}" type="datetimeFigureOut">
               <a:rPr lang="en-GB" smtClean="0"/>
-              <a:t>26/05/2025</a:t>
+              <a:t>14/07/2025</a:t>
             </a:fld>
             <a:endParaRPr lang="en-GB"/>
           </a:p>
@@ -2725,7 +2749,7 @@
           <a:p>
             <a:fld id="{1FB3EBC5-2BAE-4ECB-A995-B52653FE7498}" type="datetimeFigureOut">
               <a:rPr lang="en-GB" smtClean="0"/>
-              <a:t>26/05/2025</a:t>
+              <a:t>14/07/2025</a:t>
             </a:fld>
             <a:endParaRPr lang="en-GB"/>
           </a:p>
@@ -3145,7 +3169,7 @@
           <p:nvPr>
             <p:extLst>
               <p:ext uri="{D42A27DB-BD31-4B8C-83A1-F6EECF244321}">
-                <p14:modId xmlns:p14="http://schemas.microsoft.com/office/powerpoint/2010/main" val="2405751933"/>
+                <p14:modId xmlns:p14="http://schemas.microsoft.com/office/powerpoint/2010/main" val="18715081"/>
               </p:ext>
             </p:extLst>
           </p:nvPr>
@@ -3214,7 +3238,7 @@
                           </a:solidFill>
                           <a:latin typeface="Avenir Next LT Pro Demi" panose="020B0704020202020204" pitchFamily="34" charset="0"/>
                         </a:rPr>
-                        <a:t>Forecast</a:t>
+                        <a:t>Dataset</a:t>
                       </a:r>
                       <a:endParaRPr lang="en-GB" sz="800" dirty="0">
                         <a:solidFill>
@@ -3508,16 +3532,7 @@
                         <a:rPr lang="en-US" sz="800" dirty="0">
                           <a:latin typeface="Avenir Next LT Pro" panose="020B0504020202020204" pitchFamily="34" charset="0"/>
                         </a:rPr>
-                        <a:t>Short-Range</a:t>
-                      </a:r>
-                    </a:p>
-                    <a:p>
-                      <a:pPr algn="ctr"/>
-                      <a:r>
-                        <a:rPr lang="en-US" sz="800" dirty="0">
-                          <a:latin typeface="Avenir Next LT Pro" panose="020B0504020202020204" pitchFamily="34" charset="0"/>
-                        </a:rPr>
-                        <a:t>(Reanalysis) *</a:t>
+                        <a:t>Reanalysis*</a:t>
                       </a:r>
                       <a:endParaRPr lang="en-GB" sz="800" dirty="0">
                         <a:latin typeface="Avenir Next LT Pro" panose="020B0504020202020204" pitchFamily="34" charset="0"/>
@@ -3636,10 +3651,10 @@
                     <a:p>
                       <a:pPr algn="ctr"/>
                       <a:r>
-                        <a:rPr lang="en-US" sz="800" dirty="0">
+                        <a:rPr lang="en-US" sz="800">
                           <a:latin typeface="Avenir Next LT Pro" panose="020B0504020202020204" pitchFamily="34" charset="0"/>
                         </a:rPr>
-                        <a:t>Long-range *</a:t>
+                        <a:t>Forecasts*</a:t>
                       </a:r>
                       <a:endParaRPr lang="en-GB" sz="800" dirty="0">
                         <a:latin typeface="Avenir Next LT Pro" panose="020B0504020202020204" pitchFamily="34" charset="0"/>
@@ -3960,7 +3975,7 @@
                 </a:solidFill>
                 <a:latin typeface="Avenir Next LT Pro" panose="020B0504020202020204" pitchFamily="34" charset="0"/>
               </a:rPr>
-              <a:t> The 12 UTC runs in the ERA5’s long-range forecasts were not used in this thesis.</a:t>
+              <a:t> The 12 UTC runs in the ERA5 forecasts were not used in this thesis.</a:t>
             </a:r>
           </a:p>
         </p:txBody>
